--- a/generated_onenote_pages/01_Onboarding/01_First_Week_Plan_for_New_Engineers__welcome-deck.pptx
+++ b/generated_onenote_pages/01_Onboarding/01_First_Week_Plan_for_New_Engineers__welcome-deck.pptx
@@ -3126,6 +3126,11 @@
         <p:txBody>
           <a:bodyPr/>
           <a:lstStyle/>
+          <a:p>
+            <a:r>
+              <a:t>Attached to the "First Week Plan for New Engineers" onboarding guide in the Onboarding section, owned by Engineering Operations.</a:t>
+            </a:r>
+          </a:p>
           <a:p>
             <a:r>
               <a:t>Orientation deck used by the buddy on day one.</a:t>
